--- a/TrainerDocs/Session_04_Problem_Solving_and_Prototyping.pptx
+++ b/TrainerDocs/Session_04_Problem_Solving_and_Prototyping.pptx
@@ -332,7 +332,7 @@
           <a:p>
             <a:fld id="{5BCAD085-E8A6-8845-BD4E-CB4CCA059FC4}" type="datetimeFigureOut">
               <a:rPr lang="en-US" smtClean="0"/>
-              <a:t>10/18/2026</a:t>
+              <a:t>10/27/2026</a:t>
             </a:fld>
             <a:endParaRPr lang="en-US"/>
           </a:p>
@@ -500,7 +500,7 @@
           <a:p>
             <a:fld id="{5BCAD085-E8A6-8845-BD4E-CB4CCA059FC4}" type="datetimeFigureOut">
               <a:rPr lang="en-US" smtClean="0"/>
-              <a:t>10/18/2026</a:t>
+              <a:t>10/27/2026</a:t>
             </a:fld>
             <a:endParaRPr lang="en-US"/>
           </a:p>
@@ -678,7 +678,7 @@
           <a:p>
             <a:fld id="{5BCAD085-E8A6-8845-BD4E-CB4CCA059FC4}" type="datetimeFigureOut">
               <a:rPr lang="en-US" smtClean="0"/>
-              <a:t>10/18/2026</a:t>
+              <a:t>10/27/2026</a:t>
             </a:fld>
             <a:endParaRPr lang="en-US"/>
           </a:p>
@@ -846,7 +846,7 @@
           <a:p>
             <a:fld id="{5BCAD085-E8A6-8845-BD4E-CB4CCA059FC4}" type="datetimeFigureOut">
               <a:rPr lang="en-US" smtClean="0"/>
-              <a:t>10/18/2026</a:t>
+              <a:t>10/27/2026</a:t>
             </a:fld>
             <a:endParaRPr lang="en-US"/>
           </a:p>
@@ -1091,7 +1091,7 @@
           <a:p>
             <a:fld id="{5BCAD085-E8A6-8845-BD4E-CB4CCA059FC4}" type="datetimeFigureOut">
               <a:rPr lang="en-US" smtClean="0"/>
-              <a:t>10/18/2026</a:t>
+              <a:t>10/27/2026</a:t>
             </a:fld>
             <a:endParaRPr lang="en-US"/>
           </a:p>
@@ -1376,7 +1376,7 @@
           <a:p>
             <a:fld id="{5BCAD085-E8A6-8845-BD4E-CB4CCA059FC4}" type="datetimeFigureOut">
               <a:rPr lang="en-US" smtClean="0"/>
-              <a:t>10/18/2026</a:t>
+              <a:t>10/27/2026</a:t>
             </a:fld>
             <a:endParaRPr lang="en-US"/>
           </a:p>
@@ -1795,7 +1795,7 @@
           <a:p>
             <a:fld id="{5BCAD085-E8A6-8845-BD4E-CB4CCA059FC4}" type="datetimeFigureOut">
               <a:rPr lang="en-US" smtClean="0"/>
-              <a:t>10/18/2026</a:t>
+              <a:t>10/27/2026</a:t>
             </a:fld>
             <a:endParaRPr lang="en-US"/>
           </a:p>
@@ -1912,7 +1912,7 @@
           <a:p>
             <a:fld id="{5BCAD085-E8A6-8845-BD4E-CB4CCA059FC4}" type="datetimeFigureOut">
               <a:rPr lang="en-US" smtClean="0"/>
-              <a:t>10/18/2026</a:t>
+              <a:t>10/27/2026</a:t>
             </a:fld>
             <a:endParaRPr lang="en-US"/>
           </a:p>
@@ -2007,7 +2007,7 @@
           <a:p>
             <a:fld id="{5BCAD085-E8A6-8845-BD4E-CB4CCA059FC4}" type="datetimeFigureOut">
               <a:rPr lang="en-US" smtClean="0"/>
-              <a:t>10/18/2026</a:t>
+              <a:t>10/27/2026</a:t>
             </a:fld>
             <a:endParaRPr lang="en-US"/>
           </a:p>
@@ -2282,7 +2282,7 @@
           <a:p>
             <a:fld id="{5BCAD085-E8A6-8845-BD4E-CB4CCA059FC4}" type="datetimeFigureOut">
               <a:rPr lang="en-US" smtClean="0"/>
-              <a:t>10/18/2026</a:t>
+              <a:t>10/27/2026</a:t>
             </a:fld>
             <a:endParaRPr lang="en-US"/>
           </a:p>
@@ -2534,7 +2534,7 @@
           <a:p>
             <a:fld id="{5BCAD085-E8A6-8845-BD4E-CB4CCA059FC4}" type="datetimeFigureOut">
               <a:rPr lang="en-US" smtClean="0"/>
-              <a:t>10/18/2026</a:t>
+              <a:t>10/27/2026</a:t>
             </a:fld>
             <a:endParaRPr lang="en-US"/>
           </a:p>
@@ -2745,7 +2745,7 @@
           <a:p>
             <a:fld id="{5BCAD085-E8A6-8845-BD4E-CB4CCA059FC4}" type="datetimeFigureOut">
               <a:rPr lang="en-US" smtClean="0"/>
-              <a:t>10/18/2026</a:t>
+              <a:t>10/27/2026</a:t>
             </a:fld>
             <a:endParaRPr lang="en-US"/>
           </a:p>
@@ -15525,36 +15525,273 @@
           </a:p>
         </p:txBody>
       </p:sp>
-      <p:pic>
-        <p:nvPicPr>
-          <p:cNvPr id="11" name="Picture 10">
+      <p:sp>
+        <p:nvSpPr>
+          <p:cNvPr id="6" name="TextBox 5">
             <a:extLst>
               <a:ext uri="{FF2B5EF4-FFF2-40B4-BE49-F238E27FC236}">
-                <a16:creationId xmlns:a16="http://schemas.microsoft.com/office/drawing/2014/main" id="{B9DC91DF-FDB8-8BC8-A1E2-5F3C9383DDD0}"/>
+                <a16:creationId xmlns:a16="http://schemas.microsoft.com/office/drawing/2014/main" id="{C402AA55-B5CC-0F2D-3801-D4226DDD618B}"/>
               </a:ext>
             </a:extLst>
           </p:cNvPr>
-          <p:cNvPicPr>
-            <a:picLocks noChangeAspect="1"/>
-          </p:cNvPicPr>
-          <p:nvPr/>
-        </p:nvPicPr>
-        <p:blipFill>
-          <a:blip r:embed="rId2"/>
-          <a:stretch>
-            <a:fillRect/>
-          </a:stretch>
-        </p:blipFill>
-        <p:spPr>
-          <a:xfrm>
-            <a:off x="3776320" y="758952"/>
-            <a:ext cx="4224680" cy="4862783"/>
-          </a:xfrm>
-          <a:prstGeom prst="rect">
-            <a:avLst/>
-          </a:prstGeom>
-        </p:spPr>
-      </p:pic>
+          <p:cNvSpPr txBox="1"/>
+          <p:nvPr/>
+        </p:nvSpPr>
+        <p:spPr>
+          <a:xfrm>
+            <a:off x="754380" y="1337461"/>
+            <a:ext cx="10652760" cy="4190378"/>
+          </a:xfrm>
+          <a:prstGeom prst="rect">
+            <a:avLst/>
+          </a:prstGeom>
+          <a:noFill/>
+        </p:spPr>
+        <p:txBody>
+          <a:bodyPr wrap="square" lIns="73152" rIns="73152" bIns="27432">
+            <a:spAutoFit/>
+          </a:bodyPr>
+          <a:lstStyle/>
+          <a:p>
+            <a:pPr marL="457200" indent="-457200">
+              <a:spcAft>
+                <a:spcPts val="300"/>
+              </a:spcAft>
+              <a:buFont typeface="+mj-lt"/>
+              <a:buAutoNum type="arabicPeriod"/>
+              <a:defRPr sz="2000" b="0">
+                <a:solidFill>
+                  <a:srgbClr val="2B333D"/>
+                </a:solidFill>
+                <a:latin typeface="Aptos"/>
+              </a:defRPr>
+            </a:pPr>
+            <a:r>
+              <a:rPr lang="en-US" dirty="0"/>
+              <a:t>Business Problem: What needs to improve?</a:t>
+            </a:r>
+          </a:p>
+          <a:p>
+            <a:pPr marL="457200" indent="-457200">
+              <a:spcAft>
+                <a:spcPts val="300"/>
+              </a:spcAft>
+              <a:buFont typeface="+mj-lt"/>
+              <a:buAutoNum type="arabicPeriod"/>
+              <a:defRPr sz="2000" b="0">
+                <a:solidFill>
+                  <a:srgbClr val="2B333D"/>
+                </a:solidFill>
+                <a:latin typeface="Aptos"/>
+              </a:defRPr>
+            </a:pPr>
+            <a:endParaRPr lang="en-US" dirty="0"/>
+          </a:p>
+          <a:p>
+            <a:pPr marL="457200" indent="-457200">
+              <a:spcAft>
+                <a:spcPts val="300"/>
+              </a:spcAft>
+              <a:buFont typeface="+mj-lt"/>
+              <a:buAutoNum type="arabicPeriod"/>
+              <a:defRPr sz="2000" b="0">
+                <a:solidFill>
+                  <a:srgbClr val="2B333D"/>
+                </a:solidFill>
+                <a:latin typeface="Aptos"/>
+              </a:defRPr>
+            </a:pPr>
+            <a:r>
+              <a:rPr lang="en-US" b="1" dirty="0"/>
+              <a:t>Requirements</a:t>
+            </a:r>
+            <a:r>
+              <a:rPr lang="en-US" dirty="0"/>
+              <a:t>: What must the solution do?</a:t>
+            </a:r>
+          </a:p>
+          <a:p>
+            <a:pPr marL="457200" indent="-457200">
+              <a:spcAft>
+                <a:spcPts val="300"/>
+              </a:spcAft>
+              <a:buFont typeface="+mj-lt"/>
+              <a:buAutoNum type="arabicPeriod"/>
+              <a:defRPr sz="2000" b="0">
+                <a:solidFill>
+                  <a:srgbClr val="2B333D"/>
+                </a:solidFill>
+                <a:latin typeface="Aptos"/>
+              </a:defRPr>
+            </a:pPr>
+            <a:endParaRPr lang="en-US" dirty="0"/>
+          </a:p>
+          <a:p>
+            <a:pPr marL="457200" indent="-457200">
+              <a:spcAft>
+                <a:spcPts val="300"/>
+              </a:spcAft>
+              <a:buFont typeface="+mj-lt"/>
+              <a:buAutoNum type="arabicPeriod"/>
+              <a:defRPr sz="2000" b="0">
+                <a:solidFill>
+                  <a:srgbClr val="2B333D"/>
+                </a:solidFill>
+                <a:latin typeface="Aptos"/>
+              </a:defRPr>
+            </a:pPr>
+            <a:r>
+              <a:rPr lang="en-US" b="1" dirty="0"/>
+              <a:t>Solution Design</a:t>
+            </a:r>
+            <a:r>
+              <a:rPr lang="en-US" dirty="0"/>
+              <a:t>: What rules and logic are required?</a:t>
+            </a:r>
+          </a:p>
+          <a:p>
+            <a:pPr marL="457200" indent="-457200">
+              <a:spcAft>
+                <a:spcPts val="300"/>
+              </a:spcAft>
+              <a:buFont typeface="+mj-lt"/>
+              <a:buAutoNum type="arabicPeriod"/>
+              <a:defRPr sz="2000" b="0">
+                <a:solidFill>
+                  <a:srgbClr val="2B333D"/>
+                </a:solidFill>
+                <a:latin typeface="Aptos"/>
+              </a:defRPr>
+            </a:pPr>
+            <a:endParaRPr lang="en-US" dirty="0"/>
+          </a:p>
+          <a:p>
+            <a:pPr marL="457200" indent="-457200">
+              <a:spcAft>
+                <a:spcPts val="300"/>
+              </a:spcAft>
+              <a:buFont typeface="+mj-lt"/>
+              <a:buAutoNum type="arabicPeriod"/>
+              <a:defRPr sz="2000" b="0">
+                <a:solidFill>
+                  <a:srgbClr val="2B333D"/>
+                </a:solidFill>
+                <a:latin typeface="Aptos"/>
+              </a:defRPr>
+            </a:pPr>
+            <a:r>
+              <a:rPr lang="en-IN" b="1" dirty="0"/>
+              <a:t>Prototype</a:t>
+            </a:r>
+            <a:r>
+              <a:rPr lang="en-IN" dirty="0"/>
+              <a:t>: Can we implement the intended </a:t>
+            </a:r>
+            <a:r>
+              <a:rPr lang="en-IN" dirty="0" err="1"/>
+              <a:t>behavior</a:t>
+            </a:r>
+            <a:r>
+              <a:rPr lang="en-IN" dirty="0"/>
+              <a:t>?</a:t>
+            </a:r>
+          </a:p>
+          <a:p>
+            <a:pPr marL="457200" indent="-457200">
+              <a:spcAft>
+                <a:spcPts val="300"/>
+              </a:spcAft>
+              <a:buFont typeface="+mj-lt"/>
+              <a:buAutoNum type="arabicPeriod"/>
+              <a:defRPr sz="2000" b="0">
+                <a:solidFill>
+                  <a:srgbClr val="2B333D"/>
+                </a:solidFill>
+                <a:latin typeface="Aptos"/>
+              </a:defRPr>
+            </a:pPr>
+            <a:endParaRPr lang="en-IN" dirty="0"/>
+          </a:p>
+          <a:p>
+            <a:pPr marL="457200" indent="-457200">
+              <a:spcAft>
+                <a:spcPts val="300"/>
+              </a:spcAft>
+              <a:buFont typeface="+mj-lt"/>
+              <a:buAutoNum type="arabicPeriod"/>
+              <a:defRPr sz="2000" b="0">
+                <a:solidFill>
+                  <a:srgbClr val="2B333D"/>
+                </a:solidFill>
+                <a:latin typeface="Aptos"/>
+              </a:defRPr>
+            </a:pPr>
+            <a:r>
+              <a:rPr lang="en-IN" b="1" dirty="0"/>
+              <a:t>Testing</a:t>
+            </a:r>
+            <a:r>
+              <a:rPr lang="en-IN" dirty="0"/>
+              <a:t>: Does it work for expected and unexpected inputs?</a:t>
+            </a:r>
+          </a:p>
+          <a:p>
+            <a:pPr marL="457200" indent="-457200">
+              <a:spcAft>
+                <a:spcPts val="300"/>
+              </a:spcAft>
+              <a:buFont typeface="+mj-lt"/>
+              <a:buAutoNum type="arabicPeriod"/>
+              <a:defRPr sz="2000" b="0">
+                <a:solidFill>
+                  <a:srgbClr val="2B333D"/>
+                </a:solidFill>
+                <a:latin typeface="Aptos"/>
+              </a:defRPr>
+            </a:pPr>
+            <a:endParaRPr lang="en-IN" dirty="0"/>
+          </a:p>
+          <a:p>
+            <a:pPr marL="457200" indent="-457200">
+              <a:spcAft>
+                <a:spcPts val="300"/>
+              </a:spcAft>
+              <a:buFont typeface="+mj-lt"/>
+              <a:buAutoNum type="arabicPeriod"/>
+              <a:defRPr sz="2000" b="0">
+                <a:solidFill>
+                  <a:srgbClr val="2B333D"/>
+                </a:solidFill>
+                <a:latin typeface="Aptos"/>
+              </a:defRPr>
+            </a:pPr>
+            <a:r>
+              <a:rPr lang="en-IN" b="1" dirty="0"/>
+              <a:t>Review</a:t>
+            </a:r>
+            <a:r>
+              <a:rPr lang="en-IN" dirty="0"/>
+              <a:t>: Is the result correct, safe and fit for purpose?</a:t>
+            </a:r>
+          </a:p>
+          <a:p>
+            <a:pPr marL="457200" indent="-457200">
+              <a:spcAft>
+                <a:spcPts val="300"/>
+              </a:spcAft>
+              <a:buFont typeface="+mj-lt"/>
+              <a:buAutoNum type="arabicPeriod"/>
+              <a:defRPr sz="2000" b="0">
+                <a:solidFill>
+                  <a:srgbClr val="2B333D"/>
+                </a:solidFill>
+                <a:latin typeface="Aptos"/>
+              </a:defRPr>
+            </a:pPr>
+            <a:endParaRPr dirty="0"/>
+          </a:p>
+        </p:txBody>
+      </p:sp>
     </p:spTree>
   </p:cSld>
   <p:clrMapOvr>
@@ -15818,6 +16055,10 @@
                 <a:latin typeface="Aptos"/>
               </a:defRPr>
             </a:pPr>
+            <a:r>
+              <a:rPr lang="en-US" dirty="0"/>
+              <a:t>	</a:t>
+            </a:r>
             <a:r>
               <a:rPr dirty="0"/>
               <a:t>•  </a:t>
